--- a/2.2 Pre-processing.pptx
+++ b/2.2 Pre-processing.pptx
@@ -289,7 +289,7 @@
       <p15:notesGuideLst xmlns:p15="http://schemas.microsoft.com/office/powerpoint/2012/main"/>
     </p:ext>
     <p:ext uri="http://customooxmlschemas.google.com/">
-      <go:slidesCustomData xmlns="" xmlns:go="http://customooxmlschemas.google.com/" xmlns:ahyp="http://schemas.microsoft.com/office/drawing/2018/hyperlinkcolor" xmlns:p15="http://schemas.microsoft.com/office/powerpoint/2012/main" xmlns:p14="http://schemas.microsoft.com/office/powerpoint/2010/main" xmlns:com="http://schemas.openxmlformats.org/drawingml/2006/compatibility" xmlns:pvml="urn:schemas-microsoft-com:office:powerpoint" xmlns:v="urn:schemas-microsoft-com:vml" xmlns:o="urn:schemas-microsoft-com:office:office" xmlns:dgm="http://schemas.openxmlformats.org/drawingml/2006/diagram" xmlns:c="http://schemas.openxmlformats.org/drawingml/2006/chart" xmlns:mv="urn:schemas-microsoft-com:mac:vml" xmlns:mc="http://schemas.openxmlformats.org/markup-compatibility/2006" r:id="rId59" roundtripDataSignature="AMtx7mh3YP3xexYcFoahXa2ehi0H5V4Zaw=="/>
+      <go:slidesCustomData xmlns:mc="http://schemas.openxmlformats.org/markup-compatibility/2006" xmlns:mv="urn:schemas-microsoft-com:mac:vml" xmlns:c="http://schemas.openxmlformats.org/drawingml/2006/chart" xmlns:dgm="http://schemas.openxmlformats.org/drawingml/2006/diagram" xmlns:o="urn:schemas-microsoft-com:office:office" xmlns:v="urn:schemas-microsoft-com:vml" xmlns:pvml="urn:schemas-microsoft-com:office:powerpoint" xmlns:com="http://schemas.openxmlformats.org/drawingml/2006/compatibility" xmlns:p14="http://schemas.microsoft.com/office/powerpoint/2010/main" xmlns:p15="http://schemas.microsoft.com/office/powerpoint/2012/main" xmlns:ahyp="http://schemas.microsoft.com/office/drawing/2018/hyperlinkcolor" xmlns:go="http://customooxmlschemas.google.com/" xmlns="" r:id="rId59" roundtripDataSignature="AMtx7mh3YP3xexYcFoahXa2ehi0H5V4Zaw=="/>
     </p:ext>
   </p:extLst>
 </p:presentation>
@@ -1067,7 +1067,7 @@
           <a:p>
             <a:fld id="{0CBFB8CE-488C-4A7E-87F2-3AF6127C51C1}" type="datetimeFigureOut">
               <a:rPr lang="en-IE" smtClean="0"/>
-              <a:t>28/09/2026</a:t>
+              <a:t>01/10/2026</a:t>
             </a:fld>
             <a:endParaRPr lang="en-IE"/>
           </a:p>
@@ -7110,8 +7110,12 @@
           <a:lstStyle/>
           <a:p>
             <a:r>
+              <a:rPr lang="en-US"/>
+              <a:t>2.2 Pre-processing </a:t>
+            </a:r>
+            <a:r>
               <a:rPr lang="en-US" dirty="0"/>
-              <a:t>Pre-processing :</a:t>
+              <a:t>:</a:t>
             </a:r>
             <a:br>
               <a:rPr lang="en-US" dirty="0"/>
@@ -8595,8 +8599,8 @@
           </a:p>
         </p:txBody>
       </p:sp>
-      <mc:AlternateContent xmlns:mc="http://schemas.openxmlformats.org/markup-compatibility/2006">
-        <mc:Choice xmlns:a14="http://schemas.microsoft.com/office/drawing/2010/main" Requires="a14">
+      <mc:AlternateContent xmlns:mc="http://schemas.openxmlformats.org/markup-compatibility/2006" xmlns:a14="http://schemas.microsoft.com/office/drawing/2010/main">
+        <mc:Choice Requires="a14">
           <p:sp>
             <p:nvSpPr>
               <p:cNvPr id="3" name="Content Placeholder 2"/>
@@ -8966,7 +8970,7 @@
             </p:txBody>
           </p:sp>
         </mc:Choice>
-        <mc:Fallback>
+        <mc:Fallback xmlns="">
           <p:sp>
             <p:nvSpPr>
               <p:cNvPr id="3" name="Content Placeholder 2"/>
@@ -14373,8 +14377,8 @@
           </a:p>
         </p:txBody>
       </p:sp>
-      <mc:AlternateContent xmlns:mc="http://schemas.openxmlformats.org/markup-compatibility/2006">
-        <mc:Choice xmlns:a14="http://schemas.microsoft.com/office/drawing/2010/main" Requires="a14">
+      <mc:AlternateContent xmlns:mc="http://schemas.openxmlformats.org/markup-compatibility/2006" xmlns:a14="http://schemas.microsoft.com/office/drawing/2010/main">
+        <mc:Choice Requires="a14">
           <p:sp>
             <p:nvSpPr>
               <p:cNvPr id="3" name="Content Placeholder 2">
@@ -14961,7 +14965,7 @@
             </p:txBody>
           </p:sp>
         </mc:Choice>
-        <mc:Fallback>
+        <mc:Fallback xmlns="">
           <p:sp>
             <p:nvSpPr>
               <p:cNvPr id="3" name="Content Placeholder 2">
@@ -15124,8 +15128,8 @@
           </a:p>
         </p:txBody>
       </p:sp>
-      <mc:AlternateContent xmlns:mc="http://schemas.openxmlformats.org/markup-compatibility/2006">
-        <mc:Choice xmlns:a14="http://schemas.microsoft.com/office/drawing/2010/main" Requires="a14">
+      <mc:AlternateContent xmlns:mc="http://schemas.openxmlformats.org/markup-compatibility/2006" xmlns:a14="http://schemas.microsoft.com/office/drawing/2010/main">
+        <mc:Choice Requires="a14">
           <p:sp>
             <p:nvSpPr>
               <p:cNvPr id="3" name="Espace réservé du contenu 2"/>
@@ -16252,7 +16256,7 @@
             </p:txBody>
           </p:sp>
         </mc:Choice>
-        <mc:Fallback>
+        <mc:Fallback xmlns="">
           <p:sp>
             <p:nvSpPr>
               <p:cNvPr id="3" name="Espace réservé du contenu 2"/>
@@ -16464,8 +16468,8 @@
           </a:p>
         </p:txBody>
       </p:sp>
-      <mc:AlternateContent xmlns:mc="http://schemas.openxmlformats.org/markup-compatibility/2006">
-        <mc:Choice xmlns:a14="http://schemas.microsoft.com/office/drawing/2010/main" Requires="a14">
+      <mc:AlternateContent xmlns:mc="http://schemas.openxmlformats.org/markup-compatibility/2006" xmlns:a14="http://schemas.microsoft.com/office/drawing/2010/main">
+        <mc:Choice Requires="a14">
           <p:sp>
             <p:nvSpPr>
               <p:cNvPr id="3" name="Espace réservé du contenu 2"/>
@@ -17027,7 +17031,7 @@
             </p:txBody>
           </p:sp>
         </mc:Choice>
-        <mc:Fallback>
+        <mc:Fallback xmlns="">
           <p:sp>
             <p:nvSpPr>
               <p:cNvPr id="3" name="Espace réservé du contenu 2"/>
@@ -19180,15 +19184,6 @@
 </file>
 
 <file path=customXml/item1.xml><?xml version="1.0" encoding="utf-8"?>
-<?mso-contentType ?>
-<FormTemplates xmlns="http://schemas.microsoft.com/sharepoint/v3/contenttype/forms">
-  <Display>DocumentLibraryForm</Display>
-  <Edit>DocumentLibraryForm</Edit>
-  <New>DocumentLibraryForm</New>
-</FormTemplates>
-</file>
-
-<file path=customXml/item2.xml><?xml version="1.0" encoding="utf-8"?>
 <ct:contentTypeSchema xmlns:ct="http://schemas.microsoft.com/office/2006/metadata/contentType" xmlns:ma="http://schemas.microsoft.com/office/2006/metadata/properties/metaAttributes" ct:_="" ma:_="" ma:contentTypeName="Document" ma:contentTypeID="0x010100E6AA5C57F8EADE4E9CD6BB064C0C3195" ma:contentTypeVersion="16" ma:contentTypeDescription="Create a new document." ma:contentTypeScope="" ma:versionID="bb51c19a58f458ddcddd050a07659236">
   <xsd:schema xmlns:xsd="http://www.w3.org/2001/XMLSchema" xmlns:xs="http://www.w3.org/2001/XMLSchema" xmlns:p="http://schemas.microsoft.com/office/2006/metadata/properties" xmlns:ns2="0e422b70-e85d-4377-8ee0-b6227433d381" xmlns:ns3="199f642e-5af9-486c-ac06-f366742ef41a" targetNamespace="http://schemas.microsoft.com/office/2006/metadata/properties" ma:root="true" ma:fieldsID="0ee7a3bac0352a48a43420936abd968a" ns2:_="" ns3:_="">
     <xsd:import namespace="0e422b70-e85d-4377-8ee0-b6227433d381"/>
@@ -19429,6 +19424,15 @@
 </ct:contentTypeSchema>
 </file>
 
+<file path=customXml/item2.xml><?xml version="1.0" encoding="utf-8"?>
+<?mso-contentType ?>
+<FormTemplates xmlns="http://schemas.microsoft.com/sharepoint/v3/contenttype/forms">
+  <Display>DocumentLibraryForm</Display>
+  <Edit>DocumentLibraryForm</Edit>
+  <New>DocumentLibraryForm</New>
+</FormTemplates>
+</file>
+
 <file path=customXml/item3.xml><?xml version="1.0" encoding="utf-8"?>
 <p:properties xmlns:p="http://schemas.microsoft.com/office/2006/metadata/properties" xmlns:xsi="http://www.w3.org/2001/XMLSchema-instance" xmlns:pc="http://schemas.microsoft.com/office/infopath/2007/PartnerControls">
   <documentManagement>
@@ -19441,14 +19445,6 @@
 </file>
 
 <file path=customXml/itemProps1.xml><?xml version="1.0" encoding="utf-8"?>
-<ds:datastoreItem xmlns:ds="http://schemas.openxmlformats.org/officeDocument/2006/customXml" ds:itemID="{67DD9E9F-9EEB-4105-B29B-819486C2855A}">
-  <ds:schemaRefs>
-    <ds:schemaRef ds:uri="http://schemas.microsoft.com/sharepoint/v3/contenttype/forms"/>
-  </ds:schemaRefs>
-</ds:datastoreItem>
-</file>
-
-<file path=customXml/itemProps2.xml><?xml version="1.0" encoding="utf-8"?>
 <ds:datastoreItem xmlns:ds="http://schemas.openxmlformats.org/officeDocument/2006/customXml" ds:itemID="{04B464EA-1576-49DD-9675-1E3399D4D196}">
   <ds:schemaRefs>
     <ds:schemaRef ds:uri="http://schemas.microsoft.com/office/2006/metadata/contentType"/>
@@ -19463,6 +19459,14 @@
     <ds:schemaRef ds:uri="http://purl.org/dc/elements/1.1/"/>
     <ds:schemaRef ds:uri="http://purl.org/dc/terms/"/>
     <ds:schemaRef ds:uri="http://schemas.microsoft.com/internal/obd"/>
+  </ds:schemaRefs>
+</ds:datastoreItem>
+</file>
+
+<file path=customXml/itemProps2.xml><?xml version="1.0" encoding="utf-8"?>
+<ds:datastoreItem xmlns:ds="http://schemas.openxmlformats.org/officeDocument/2006/customXml" ds:itemID="{67DD9E9F-9EEB-4105-B29B-819486C2855A}">
+  <ds:schemaRefs>
+    <ds:schemaRef ds:uri="http://schemas.microsoft.com/sharepoint/v3/contenttype/forms"/>
   </ds:schemaRefs>
 </ds:datastoreItem>
 </file>
